--- a/decks/englit-romeo/englit-romeo_ch4_warnings-and-the-turning-point.pptx
+++ b/decks/englit-romeo/englit-romeo_ch4_warnings-and-the-turning-point.pptx
@@ -123,36 +123,36 @@
   <p:extLst>
     <p:ext uri="{521415D9-36F7-43E2-AB2F-B90AF26B5E84}">
       <p14:sectionLst xmlns:p14="http://schemas.microsoft.com/office/powerpoint/2010/main">
-        <p14:section name="Opening" id="{e9fd9bd9-f3de-b3cf-d124-f01a3e0c2067}">
+        <p14:section name="Opening" id="{fc482baa-ca7e-e4b7-ed81-0cdc7577a583}">
           <p14:sldIdLst>
             <p14:sldId id="256"/>
           </p14:sldIdLst>
         </p14:section>
-        <p14:section name="Gate" id="{0b5a8e50-767a-e246-dadb-b97e20fb5a73}">
+        <p14:section name="Gate" id="{9a26f006-edb8-c382-15ab-8f8427a5b15c}">
           <p14:sldIdLst>
             <p14:sldId id="257"/>
             <p14:sldId id="258"/>
           </p14:sldIdLst>
         </p14:section>
-        <p14:section name="Pre-teach" id="{a8f3d023-1578-578f-6a52-1e6c0e8e5369}">
+        <p14:section name="Pre-teach" id="{360dc036-1422-cbbe-b9c8-0611f554683a}">
           <p14:sldIdLst>
             <p14:sldId id="259"/>
           </p14:sldIdLst>
         </p14:section>
-        <p14:section name="Read-along" id="{1701fb0d-378f-b973-3643-430cfc45fd71}">
+        <p14:section name="Read-along" id="{d7814d78-f389-d4b7-d67e-55b119466e07}">
           <p14:sldIdLst>
             <p14:sldId id="260"/>
             <p14:sldId id="261"/>
           </p14:sldIdLst>
         </p14:section>
-        <p14:section name="Teach" id="{4eb0aa10-52b4-1ba5-358e-b164243d4648}">
+        <p14:section name="Teach" id="{135b491d-fb3e-9ad6-e364-c778f8eb27e9}">
           <p14:sldIdLst>
             <p14:sldId id="262"/>
             <p14:sldId id="263"/>
             <p14:sldId id="264"/>
           </p14:sldIdLst>
         </p14:section>
-        <p14:section name="Routes" id="{b7446ad1-a4eb-2961-aaa0-bbaa1f6b843d}">
+        <p14:section name="Routes" id="{a4ebb81e-f5c7-448d-696c-a14561daf4f2}">
           <p14:sldIdLst>
             <p14:sldId id="265"/>
             <p14:sldId id="266"/>
@@ -160,12 +160,12 @@
             <p14:sldId id="268"/>
           </p14:sldIdLst>
         </p14:section>
-        <p14:section name="Close" id="{087bffa2-11fb-4625-e2f5-037b91b97a31}">
+        <p14:section name="Close" id="{eb1383e8-b974-fdcd-1cfb-249a4771319b}">
           <p14:sldIdLst>
             <p14:sldId id="269"/>
           </p14:sldIdLst>
         </p14:section>
-        <p14:section name="Answers" id="{554c83cf-d870-0085-8bb7-cac682f3e7ff}">
+        <p14:section name="Answers" id="{cc0aff2c-61f7-0c22-3fff-add1bebabc97}">
           <p14:sldIdLst>
             <p14:sldId id="270"/>
             <p14:sldId id="271"/>
@@ -1045,7 +1045,7 @@
               <a:rPr lang="en-US" dirty="0"/>
               <a:t>Exit ticket — individual, silent, on a slip or mini-whiteboard. Recall before help: no notes, no lanes, no hints. Collect before pupils leave.
 Question: Which of these is an example of foreshadowing in Act 2 Scene 3?
-Answer: A   The Friar says that poison and medicine live in the same flower. The flower that is both poison and medicine points forward to the sleeping potion and to Romeo's poison in Act 5.
+Answer: C   The Friar says that poison and medicine live in the same flower. The flower that is both poison and medicine points forward to the sleeping potion and to Romeo's poison in Act 5.
 Source of this question: gate item 1 re-asked (options rotated) — this chapter has no third quick-check module.
 The ebook also holds task 3, "How Shakespeare presents Mercutio", for homework or the next lesson's do now.
 Sort the slips: correct → ready to move on; incorrect → start next lesson in the pre-teach group, with the read-along and the Support lane. Same destination next time.</a:t>
@@ -1228,7 +1228,7 @@
             <a:r>
               <a:rPr lang="en-US" dirty="0"/>
               <a:t>Answers — task 2: Dramatic irony in the fight scene. Reveal the answer; pupils mark their own work in a different colour, then read the "why" together. Same destination for every lane, so one answer serves the whole class.
-Answer: B   Because the audience knows Romeo has just married Tybalt's cousin, but Tybalt and Mercutio do not
+Answer: A   Because the audience knows Romeo has just married Tybalt's cousin, but Tybalt and Mercutio do not
 Why: Romeo is being kind for a reason only we understand. Tybalt hears mockery, Mercutio sees cowardice, and Mercutio draws his sword to defend an honour Romeo has not lost. The gap between what we know and what they know kills him.
 Ask a Support pupil to explain one step, and a Stretch pupil to share their extension.</a:t>
             </a:r>
@@ -1319,7 +1319,7 @@
             <a:r>
               <a:rPr lang="en-US" dirty="0"/>
               <a:t>Answers — exit ticket: Exit ticket. Reveal the answer; pupils mark their own work in a different colour, then read the "why" together. Same destination for every lane, so one answer serves the whole class.
-Answer: A   The Friar says that poison and medicine live in the same flower
+Answer: C   The Friar says that poison and medicine live in the same flower
 Why: The flower that is both poison and medicine points forward to the sleeping potion and to Romeo's poison in Act 5.
 Ask a Support pupil to explain one step, and a Stretch pupil to share their extension.</a:t>
             </a:r>
@@ -1410,7 +1410,7 @@
             <a:r>
               <a:rPr lang="en-US" dirty="0"/>
               <a:t>Do now — retrieval. Silent, no notes, no help: recall comes before any support. Give about four minutes.
-1. Which of these is an example of foreshadowing in Act 2 Scene 3?  →  B   The Friar says that poison and medicine live in the same flower
+1. Which of these is an example of foreshadowing in Act 2 Scene 3?  →  D   The Friar says that poison and medicine live in the same flower
 2. The audience knows that Romeo has just married Juliet, but Tybalt does not. This is called ___ irony.  →  dramatic
 3. Who kills Mercutio?  →  C   Tybalt
 Circulate: who gets 3/3 (Stretch route), 2/3 (Core), 0–1 (Support)? Use this to route pupils later in the lesson.</a:t>
@@ -1502,7 +1502,7 @@
             <a:r>
               <a:rPr lang="en-US" dirty="0"/>
               <a:t>Answers — pupils mark their own in a different colour, then hands up for 3/3, 2/3, 1/3.
-1. B   The Friar says that poison and medicine live in the same flower. The flower that is both poison and medicine points forward to the sleeping potion and to Romeo's poison in Act 5.
+1. D   The Friar says that poison and medicine live in the same flower. The flower that is both poison and medicine points forward to the sleeping potion and to Romeo's poison in Act 5.
 2. dramatic. Dramatic irony is when the audience knows something a character on stage does not. Here it makes Romeo's gentleness look like cowardice to Tybalt.
 3. C   Tybalt. Tybalt stabs Mercutio under Romeo's arm as Romeo tries to part them. Romeo then kills Tybalt in revenge.
 Say the route each score points to: 3/3 Stretch, 2/3 Core, 0–1 Support. Pupils may choose to move up.</a:t>
@@ -6314,7 +6314,7 @@
                 <a:ea typeface="Calibri" pitchFamily="34" charset="-122"/>
                 <a:cs typeface="Calibri" pitchFamily="34" charset="-120"/>
               </a:rPr>
-              <a:t>Because Romeo is lying about loving Tybalt</a:t>
+              <a:t>Because the audience knows Romeo has just married Tybalt's cousin, but Tybalt and Mercutio do not</a:t>
             </a:r>
             <a:endParaRPr lang="en-US" sz="2600" dirty="0"/>
           </a:p>
@@ -6351,7 +6351,7 @@
                 <a:ea typeface="Calibri" pitchFamily="34" charset="-122"/>
                 <a:cs typeface="Calibri" pitchFamily="34" charset="-120"/>
               </a:rPr>
-              <a:t>Because the audience knows Romeo has just married Tybalt's cousin, but Tybalt and Mercutio do not</a:t>
+              <a:t>Because Romeo is lying about loving Tybalt</a:t>
             </a:r>
             <a:endParaRPr lang="en-US" sz="2600" dirty="0"/>
           </a:p>
@@ -7792,7 +7792,7 @@
                 <a:ea typeface="Calibri" pitchFamily="34" charset="-122"/>
                 <a:cs typeface="Calibri" pitchFamily="34" charset="-120"/>
               </a:rPr>
-              <a:t>The Friar says that poison and medicine live in the same flower</a:t>
+              <a:t>The Friar agrees to perform the wedding</a:t>
             </a:r>
             <a:endParaRPr lang="en-US" sz="2400" dirty="0"/>
           </a:p>
@@ -7829,7 +7829,7 @@
                 <a:ea typeface="Calibri" pitchFamily="34" charset="-122"/>
                 <a:cs typeface="Calibri" pitchFamily="34" charset="-120"/>
               </a:rPr>
-              <a:t>The Friar agrees to perform the wedding</a:t>
+              <a:t>Romeo asks what time it is</a:t>
             </a:r>
             <a:endParaRPr lang="en-US" sz="2400" dirty="0"/>
           </a:p>
@@ -7866,7 +7866,7 @@
                 <a:ea typeface="Calibri" pitchFamily="34" charset="-122"/>
                 <a:cs typeface="Calibri" pitchFamily="34" charset="-120"/>
               </a:rPr>
-              <a:t>Romeo asks what time it is</a:t>
+              <a:t>The Friar says that poison and medicine live in the same flower</a:t>
             </a:r>
             <a:endParaRPr lang="en-US" sz="2400" dirty="0"/>
           </a:p>
@@ -8878,7 +8878,7 @@
                 <a:ea typeface="Cambria" pitchFamily="34" charset="-122"/>
                 <a:cs typeface="Cambria" pitchFamily="34" charset="-120"/>
               </a:rPr>
-              <a:t>B   Because the audience knows Romeo has just married Tybalt's cousin, but Tybalt and Mercutio do not</a:t>
+              <a:t>A   Because the audience knows Romeo has just married Tybalt's cousin, but Tybalt and Mercutio do not</a:t>
             </a:r>
             <a:endParaRPr lang="en-US" sz="1800" dirty="0"/>
           </a:p>
@@ -9337,7 +9337,7 @@
                 <a:ea typeface="Cambria" pitchFamily="34" charset="-122"/>
                 <a:cs typeface="Cambria" pitchFamily="34" charset="-120"/>
               </a:rPr>
-              <a:t>A   The Friar says that poison and medicine live in the same flower</a:t>
+              <a:t>C   The Friar says that poison and medicine live in the same flower</a:t>
             </a:r>
             <a:endParaRPr lang="en-US" sz="1800" dirty="0"/>
           </a:p>
@@ -9908,7 +9908,7 @@
                 <a:ea typeface="Calibri" pitchFamily="34" charset="-122"/>
                 <a:cs typeface="Calibri" pitchFamily="34" charset="-120"/>
               </a:rPr>
-              <a:t>The Friar says that poison and medicine live in the same flower</a:t>
+              <a:t>The Friar agrees to perform the wedding</a:t>
             </a:r>
             <a:endParaRPr lang="en-US" sz="2200" dirty="0"/>
           </a:p>
@@ -9945,7 +9945,7 @@
                 <a:ea typeface="Calibri" pitchFamily="34" charset="-122"/>
                 <a:cs typeface="Calibri" pitchFamily="34" charset="-120"/>
               </a:rPr>
-              <a:t>The Friar agrees to perform the wedding</a:t>
+              <a:t>Romeo asks what time it is</a:t>
             </a:r>
             <a:endParaRPr lang="en-US" sz="2200" dirty="0"/>
           </a:p>
@@ -9982,7 +9982,7 @@
                 <a:ea typeface="Calibri" pitchFamily="34" charset="-122"/>
                 <a:cs typeface="Calibri" pitchFamily="34" charset="-120"/>
               </a:rPr>
-              <a:t>Romeo asks what time it is</a:t>
+              <a:t>The Friar says that poison and medicine live in the same flower</a:t>
             </a:r>
             <a:endParaRPr lang="en-US" sz="2200" dirty="0"/>
           </a:p>
@@ -10384,7 +10384,7 @@
                 <a:ea typeface="Calibri" pitchFamily="34" charset="-122"/>
                 <a:cs typeface="Calibri" pitchFamily="34" charset="-120"/>
               </a:rPr>
-              <a:t>Romeo</a:t>
+              <a:t>Paris</a:t>
             </a:r>
             <a:endParaRPr lang="en-US" sz="2400" dirty="0"/>
           </a:p>
@@ -10421,7 +10421,7 @@
                 <a:ea typeface="Calibri" pitchFamily="34" charset="-122"/>
                 <a:cs typeface="Calibri" pitchFamily="34" charset="-120"/>
               </a:rPr>
-              <a:t>Benvolio</a:t>
+              <a:t>Romeo</a:t>
             </a:r>
             <a:endParaRPr lang="en-US" sz="2400" dirty="0"/>
           </a:p>
@@ -10495,7 +10495,7 @@
                 <a:ea typeface="Calibri" pitchFamily="34" charset="-122"/>
                 <a:cs typeface="Calibri" pitchFamily="34" charset="-120"/>
               </a:rPr>
-              <a:t>Paris</a:t>
+              <a:t>Benvolio</a:t>
             </a:r>
             <a:endParaRPr lang="en-US" sz="2400" dirty="0"/>
           </a:p>
@@ -10896,7 +10896,7 @@
                 <a:ea typeface="Calibri" pitchFamily="34" charset="-122"/>
                 <a:cs typeface="Calibri" pitchFamily="34" charset="-120"/>
               </a:rPr>
-              <a:t>B   The Friar says that poison and medicine live in the same flower</a:t>
+              <a:t>D   The Friar says that poison and medicine live in the same flower</a:t>
             </a:r>
             <a:endParaRPr lang="en-US" sz="2200" dirty="0"/>
           </a:p>

--- a/decks/englit-romeo/englit-romeo_ch4_warnings-and-the-turning-point.pptx
+++ b/decks/englit-romeo/englit-romeo_ch4_warnings-and-the-turning-point.pptx
@@ -123,36 +123,36 @@
   <p:extLst>
     <p:ext uri="{521415D9-36F7-43E2-AB2F-B90AF26B5E84}">
       <p14:sectionLst xmlns:p14="http://schemas.microsoft.com/office/powerpoint/2010/main">
-        <p14:section name="Opening" id="{fc482baa-ca7e-e4b7-ed81-0cdc7577a583}">
+        <p14:section name="Opening" id="{64732cc9-fba5-48f8-8071-f722c28aa426}">
           <p14:sldIdLst>
             <p14:sldId id="256"/>
           </p14:sldIdLst>
         </p14:section>
-        <p14:section name="Gate" id="{9a26f006-edb8-c382-15ab-8f8427a5b15c}">
+        <p14:section name="Gate" id="{d1717a9f-5929-18fd-71c5-cb64e69b1f7f}">
           <p14:sldIdLst>
             <p14:sldId id="257"/>
             <p14:sldId id="258"/>
           </p14:sldIdLst>
         </p14:section>
-        <p14:section name="Pre-teach" id="{360dc036-1422-cbbe-b9c8-0611f554683a}">
+        <p14:section name="Pre-teach" id="{b5570b29-7fbf-eb6c-8872-e1ee2998c0e9}">
           <p14:sldIdLst>
             <p14:sldId id="259"/>
           </p14:sldIdLst>
         </p14:section>
-        <p14:section name="Read-along" id="{d7814d78-f389-d4b7-d67e-55b119466e07}">
+        <p14:section name="Read-along" id="{7222962d-1498-c3e4-fc5e-344892caa761}">
           <p14:sldIdLst>
             <p14:sldId id="260"/>
             <p14:sldId id="261"/>
           </p14:sldIdLst>
         </p14:section>
-        <p14:section name="Teach" id="{135b491d-fb3e-9ad6-e364-c778f8eb27e9}">
+        <p14:section name="Teach" id="{f5252606-9acd-3e64-a532-17f84fba5276}">
           <p14:sldIdLst>
             <p14:sldId id="262"/>
             <p14:sldId id="263"/>
             <p14:sldId id="264"/>
           </p14:sldIdLst>
         </p14:section>
-        <p14:section name="Routes" id="{a4ebb81e-f5c7-448d-696c-a14561daf4f2}">
+        <p14:section name="Routes" id="{c2328c3d-c213-1c20-a85a-f64d7476dc14}">
           <p14:sldIdLst>
             <p14:sldId id="265"/>
             <p14:sldId id="266"/>
@@ -160,12 +160,12 @@
             <p14:sldId id="268"/>
           </p14:sldIdLst>
         </p14:section>
-        <p14:section name="Close" id="{eb1383e8-b974-fdcd-1cfb-249a4771319b}">
+        <p14:section name="Close" id="{b5c026bd-4d3b-2959-04c9-e4d1f9b03fc6}">
           <p14:sldIdLst>
             <p14:sldId id="269"/>
           </p14:sldIdLst>
         </p14:section>
-        <p14:section name="Answers" id="{cc0aff2c-61f7-0c22-3fff-add1bebabc97}">
+        <p14:section name="Answers" id="{ca36a457-d76a-d941-f639-01611847b78b}">
           <p14:sldIdLst>
             <p14:sldId id="270"/>
             <p14:sldId id="271"/>
